--- a/dataset/guides_final/SEC/manual/IT-SEC-004-M_보안 예외 신청·정책 처리 매뉴얼.pptx
+++ b/dataset/guides_final/SEC/manual/IT-SEC-004-M_보안 예외 신청·정책 처리 매뉴얼.pptx
@@ -32104,7 +32104,7 @@
                 <a:ea typeface="Malgun Gothic"/>
                 <a:cs typeface="Malgun Gothic"/>
               </a:rPr>
-              <a:t>티켓: 사이트 차단 해제, AI 도구 검토 요청. 정보보안팀에 배정하고 RDY → IP → FIN → CLS 으로 관리한다.</a:t>
+              <a:t>티켓: 사이트 차단 해제, AI 도구 검토 요청. 정보보안팀에 배정하고 RDY → WIP → FIN → CLS 으로 관리한다.</a:t>
             </a:r>
           </a:p>
         </p:txBody>

--- a/dataset/guides_final/SEC/manual/IT-SEC-004-M_보안 예외 신청·정책 처리 매뉴얼.pptx
+++ b/dataset/guides_final/SEC/manual/IT-SEC-004-M_보안 예외 신청·정책 처리 매뉴얼.pptx
@@ -3238,7 +3238,7 @@
                 <a:ea typeface="Malgun Gothic"/>
                 <a:cs typeface="Malgun Gothic"/>
               </a:rPr>
-              <a:t>한화시스템 ICT IT 담당자 매뉴얼 · 정보보안</a:t>
+              <a:t>가상 ICT 기업 IT 담당자 매뉴얼 · 정보보안</a:t>
             </a:r>
           </a:p>
         </p:txBody>
@@ -3517,7 +3517,7 @@
                 <a:ea typeface="Malgun Gothic"/>
                 <a:cs typeface="Malgun Gothic"/>
               </a:rPr>
-              <a:t>© HANWHA SYSTEMS ICT · IT-SEC-004-M · 사내 제한</a:t>
+              <a:t>© 가상 ICT 기업 · IT-SEC-004-M · 사내 제한</a:t>
             </a:r>
           </a:p>
         </p:txBody>
@@ -6338,7 +6338,7 @@
                 <a:ea typeface="Malgun Gothic"/>
                 <a:cs typeface="Malgun Gothic"/>
               </a:rPr>
-              <a:t>© HANWHA SYSTEMS ICT · IT-SEC-004-M · 사내 제한</a:t>
+              <a:t>© 가상 ICT 기업 · IT-SEC-004-M · 사내 제한</a:t>
             </a:r>
           </a:p>
         </p:txBody>
@@ -7652,7 +7652,7 @@
                 <a:ea typeface="Malgun Gothic"/>
                 <a:cs typeface="Malgun Gothic"/>
               </a:rPr>
-              <a:t>© HANWHA SYSTEMS ICT · IT-SEC-004-M · 사내 제한</a:t>
+              <a:t>© 가상 ICT 기업 · IT-SEC-004-M · 사내 제한</a:t>
             </a:r>
           </a:p>
         </p:txBody>
@@ -10490,7 +10490,7 @@
                 <a:ea typeface="Malgun Gothic"/>
                 <a:cs typeface="Malgun Gothic"/>
               </a:rPr>
-              <a:t>© HANWHA SYSTEMS ICT · IT-SEC-004-M · 사내 제한</a:t>
+              <a:t>© 가상 ICT 기업 · IT-SEC-004-M · 사내 제한</a:t>
             </a:r>
           </a:p>
         </p:txBody>
@@ -11603,7 +11603,7 @@
                 <a:ea typeface="Malgun Gothic"/>
                 <a:cs typeface="Malgun Gothic"/>
               </a:rPr>
-              <a:t>© HANWHA SYSTEMS ICT · IT-SEC-004-M · 사내 제한</a:t>
+              <a:t>© 가상 ICT 기업 · IT-SEC-004-M · 사내 제한</a:t>
             </a:r>
           </a:p>
         </p:txBody>
@@ -13815,7 +13815,7 @@
                 <a:ea typeface="Malgun Gothic"/>
                 <a:cs typeface="Malgun Gothic"/>
               </a:rPr>
-              <a:t>© HANWHA SYSTEMS ICT · IT-SEC-004-M · 사내 제한</a:t>
+              <a:t>© 가상 ICT 기업 · IT-SEC-004-M · 사내 제한</a:t>
             </a:r>
           </a:p>
         </p:txBody>
@@ -14887,7 +14887,7 @@
                 <a:ea typeface="Malgun Gothic"/>
                 <a:cs typeface="Malgun Gothic"/>
               </a:rPr>
-              <a:t>© HANWHA SYSTEMS ICT · IT-SEC-004-M · 사내 제한</a:t>
+              <a:t>© 가상 ICT 기업 · IT-SEC-004-M · 사내 제한</a:t>
             </a:r>
           </a:p>
         </p:txBody>
@@ -15906,7 +15906,7 @@
                 <a:ea typeface="Malgun Gothic"/>
                 <a:cs typeface="Malgun Gothic"/>
               </a:rPr>
-              <a:t>© HANWHA SYSTEMS ICT · IT-SEC-004-M · 사내 제한</a:t>
+              <a:t>© 가상 ICT 기업 · IT-SEC-004-M · 사내 제한</a:t>
             </a:r>
           </a:p>
         </p:txBody>
@@ -18698,7 +18698,7 @@
                 <a:ea typeface="Malgun Gothic"/>
                 <a:cs typeface="Malgun Gothic"/>
               </a:rPr>
-              <a:t>© HANWHA SYSTEMS ICT · IT-SEC-004-M · 사내 제한</a:t>
+              <a:t>© 가상 ICT 기업 · IT-SEC-004-M · 사내 제한</a:t>
             </a:r>
           </a:p>
         </p:txBody>
@@ -19855,7 +19855,7 @@
                 <a:ea typeface="Malgun Gothic"/>
                 <a:cs typeface="Malgun Gothic"/>
               </a:rPr>
-              <a:t>© HANWHA SYSTEMS ICT · IT-SEC-004-M · 사내 제한</a:t>
+              <a:t>© 가상 ICT 기업 · IT-SEC-004-M · 사내 제한</a:t>
             </a:r>
           </a:p>
         </p:txBody>
@@ -20103,7 +20103,7 @@
                 <a:ea typeface="Malgun Gothic"/>
                 <a:cs typeface="Malgun Gothic"/>
               </a:rPr>
-              <a:t>© HANWHA SYSTEMS ICT · IT-SEC-004-M · 사내 제한</a:t>
+              <a:t>© 가상 ICT 기업 · IT-SEC-004-M · 사내 제한</a:t>
             </a:r>
           </a:p>
         </p:txBody>
@@ -21746,7 +21746,7 @@
                 <a:ea typeface="Malgun Gothic"/>
                 <a:cs typeface="Malgun Gothic"/>
               </a:rPr>
-              <a:t>© HANWHA SYSTEMS ICT · IT-SEC-004-M · 사내 제한</a:t>
+              <a:t>© 가상 ICT 기업 · IT-SEC-004-M · 사내 제한</a:t>
             </a:r>
           </a:p>
         </p:txBody>
@@ -22590,7 +22590,7 @@
                 <a:ea typeface="Malgun Gothic"/>
                 <a:cs typeface="Malgun Gothic"/>
               </a:rPr>
-              <a:t>© HANWHA SYSTEMS ICT · IT-SEC-004-M · 사내 제한</a:t>
+              <a:t>© 가상 ICT 기업 · IT-SEC-004-M · 사내 제한</a:t>
             </a:r>
           </a:p>
         </p:txBody>
@@ -22838,7 +22838,7 @@
                 <a:ea typeface="Malgun Gothic"/>
                 <a:cs typeface="Malgun Gothic"/>
               </a:rPr>
-              <a:t>© HANWHA SYSTEMS ICT · IT-SEC-004-M · 사내 제한</a:t>
+              <a:t>© 가상 ICT 기업 · IT-SEC-004-M · 사내 제한</a:t>
             </a:r>
           </a:p>
         </p:txBody>
@@ -24090,7 +24090,7 @@
                 <a:ea typeface="Malgun Gothic"/>
                 <a:cs typeface="Malgun Gothic"/>
               </a:rPr>
-              <a:t>© HANWHA SYSTEMS ICT · IT-SEC-004-M · 사내 제한</a:t>
+              <a:t>© 가상 ICT 기업 · IT-SEC-004-M · 사내 제한</a:t>
             </a:r>
           </a:p>
         </p:txBody>
@@ -24338,7 +24338,7 @@
                 <a:ea typeface="Malgun Gothic"/>
                 <a:cs typeface="Malgun Gothic"/>
               </a:rPr>
-              <a:t>© HANWHA SYSTEMS ICT · IT-SEC-004-M · 사내 제한</a:t>
+              <a:t>© 가상 ICT 기업 · IT-SEC-004-M · 사내 제한</a:t>
             </a:r>
           </a:p>
         </p:txBody>
@@ -25984,7 +25984,7 @@
                 <a:ea typeface="Malgun Gothic"/>
                 <a:cs typeface="Malgun Gothic"/>
               </a:rPr>
-              <a:t>© HANWHA SYSTEMS ICT · IT-SEC-004-M · 사내 제한</a:t>
+              <a:t>© 가상 ICT 기업 · IT-SEC-004-M · 사내 제한</a:t>
             </a:r>
           </a:p>
         </p:txBody>
@@ -26914,7 +26914,7 @@
                 <a:ea typeface="Malgun Gothic"/>
                 <a:cs typeface="Malgun Gothic"/>
               </a:rPr>
-              <a:t>© HANWHA SYSTEMS ICT · IT-SEC-004-M · 사내 제한</a:t>
+              <a:t>© 가상 ICT 기업 · IT-SEC-004-M · 사내 제한</a:t>
             </a:r>
           </a:p>
         </p:txBody>
@@ -28060,7 +28060,7 @@
                 <a:ea typeface="Malgun Gothic"/>
                 <a:cs typeface="Malgun Gothic"/>
               </a:rPr>
-              <a:t>© HANWHA SYSTEMS ICT · IT-SEC-004-M · 사내 제한</a:t>
+              <a:t>© 가상 ICT 기업 · IT-SEC-004-M · 사내 제한</a:t>
             </a:r>
           </a:p>
         </p:txBody>
@@ -28308,7 +28308,7 @@
                 <a:ea typeface="Malgun Gothic"/>
                 <a:cs typeface="Malgun Gothic"/>
               </a:rPr>
-              <a:t>© HANWHA SYSTEMS ICT · IT-SEC-004-M · 사내 제한</a:t>
+              <a:t>© 가상 ICT 기업 · IT-SEC-004-M · 사내 제한</a:t>
             </a:r>
           </a:p>
         </p:txBody>
@@ -29230,7 +29230,7 @@
                 <a:ea typeface="Malgun Gothic"/>
                 <a:cs typeface="Malgun Gothic"/>
               </a:rPr>
-              <a:t>© HANWHA SYSTEMS ICT · IT-SEC-004-M · 사내 제한</a:t>
+              <a:t>© 가상 ICT 기업 · IT-SEC-004-M · 사내 제한</a:t>
             </a:r>
           </a:p>
         </p:txBody>
@@ -29478,7 +29478,7 @@
                 <a:ea typeface="Malgun Gothic"/>
                 <a:cs typeface="Malgun Gothic"/>
               </a:rPr>
-              <a:t>© HANWHA SYSTEMS ICT · IT-SEC-004-M · 사내 제한</a:t>
+              <a:t>© 가상 ICT 기업 · IT-SEC-004-M · 사내 제한</a:t>
             </a:r>
           </a:p>
         </p:txBody>
@@ -32668,7 +32668,7 @@
                 <a:ea typeface="Malgun Gothic"/>
                 <a:cs typeface="Malgun Gothic"/>
               </a:rPr>
-              <a:t>© HANWHA SYSTEMS ICT · IT-SEC-004-M · 사내 제한</a:t>
+              <a:t>© 가상 ICT 기업 · IT-SEC-004-M · 사내 제한</a:t>
             </a:r>
           </a:p>
         </p:txBody>
@@ -33113,7 +33113,7 @@
                 <a:ea typeface="Malgun Gothic"/>
                 <a:cs typeface="Malgun Gothic"/>
               </a:rPr>
-              <a:t>© HANWHA SYSTEMS ICT · IT-SEC-004-M · 사내 제한</a:t>
+              <a:t>© 가상 ICT 기업 · IT-SEC-004-M · 사내 제한</a:t>
             </a:r>
           </a:p>
         </p:txBody>
@@ -33361,7 +33361,7 @@
                 <a:ea typeface="Malgun Gothic"/>
                 <a:cs typeface="Malgun Gothic"/>
               </a:rPr>
-              <a:t>© HANWHA SYSTEMS ICT · IT-SEC-004-M · 사내 제한</a:t>
+              <a:t>© 가상 ICT 기업 · IT-SEC-004-M · 사내 제한</a:t>
             </a:r>
           </a:p>
         </p:txBody>
